--- a/MorningHands_Student_Presentation.pptx
+++ b/MorningHands_Student_Presentation.pptx
@@ -128,13 +128,13 @@
   <p:extLst>
     <p:ext uri="{521415D9-36F7-43E2-AB2F-B90AF26B5E84}">
       <p14:sectionLst xmlns:p14="http://schemas.microsoft.com/office/powerpoint/2010/main">
-        <p14:section name="도입" id="{7d4ac4fb-55ee-94e5-b152-554837e89417}">
+        <p14:section name="도입" id="{c91bb8f2-c179-a93f-a850-595f82af5ccd}">
           <p14:sldIdLst>
             <p14:sldId id="256"/>
             <p14:sldId id="257"/>
           </p14:sldIdLst>
         </p14:section>
-        <p14:section name="1부 조사" id="{b4bb3f3f-71de-d901-4d71-438480f056d2}">
+        <p14:section name="1부 조사" id="{d33f214a-d894-0985-e869-e39f35a3937b}">
           <p14:sldIdLst>
             <p14:sldId id="258"/>
             <p14:sldId id="259"/>
@@ -144,7 +144,7 @@
             <p14:sldId id="263"/>
           </p14:sldIdLst>
         </p14:section>
-        <p14:section name="2부 매출" id="{760d8769-44d0-2b5d-1d02-e90b35113c06}">
+        <p14:section name="2부 매출" id="{0b368df0-a5ca-4b51-3331-52ea5c800138}">
           <p14:sldIdLst>
             <p14:sldId id="264"/>
             <p14:sldId id="265"/>
@@ -154,19 +154,19 @@
             <p14:sldId id="269"/>
           </p14:sldIdLst>
         </p14:section>
-        <p14:section name="3부 환원" id="{6767fa9a-993d-c6a5-f326-f8d52d33d2d9}">
+        <p14:section name="3부 환원" id="{e95c9248-d04d-2f6f-a9a4-e187aa9f7a71}">
           <p14:sldIdLst>
             <p14:sldId id="270"/>
             <p14:sldId id="271"/>
           </p14:sldIdLst>
         </p14:section>
-        <p14:section name="마무리" id="{03954bff-25ad-f8bd-81fc-a6c94856e8ef}">
+        <p14:section name="마무리" id="{61b7f2af-7629-e83d-8519-6266d1ba1d9f}">
           <p14:sldIdLst>
             <p14:sldId id="272"/>
             <p14:sldId id="273"/>
           </p14:sldIdLst>
         </p14:section>
-        <p14:section name="부록" id="{76da2f9b-1986-9a04-e7a7-2e658110c3e4}">
+        <p14:section name="부록" id="{87fe39e5-9f49-118a-3487-8f90059dc74e}">
           <p14:sldIdLst>
             <p14:sldId id="274"/>
             <p14:sldId id="275"/>
@@ -1370,7 +1370,7 @@
           <a:p>
             <a:r>
               <a:rPr lang="en-US" dirty="0"/>
-              <a:t>정리하겠습니다. 첫째, 비슷한 제품은 Clocky가 연 평균 약 4백만 달러로 추정되고, Hatch는 언론 보도로 연 1억 4천만에서 2억 달러였습니다. 기상과 수면 제품 시장이 작지 않다는 뜻입니다. 둘째, 우리는 1년차 매출 9억 원, 3년차 54억 원을 계획했습니다. 처음에는 고정비 때문에 적자이고, 2년차부터 흑자가 되는 계획이며, 숫자는 대부분 가정입니다. 셋째, 번 돈이 아니라 매출의 0.5%를 사회에 환원하겠습니다. 국내 100대 기업 평균의 약 4배 수준입니다. 다음 단계는 소비자 설문, 부품 견적, 특허 조사입니다. 들어 주셔서 감사합니다. 질문 있으시면 말씀해 주세요.</a:t>
+              <a:t>정리하겠습니다. 첫째, 비슷한 제품은 Clocky가 연 평균 약 4백만 달러로 추정되고, Hatch는 회사 전체 매출이 언론 보도로 연 1억 4천만에서 2억 달러라고 하지만, 보도마다 다르고 수면 시계만의 매출은 확인하지 못했습니다. 둘째, 우리는 1년차 매출 9억 원, 3년차 54억 원을 계획했습니다. 처음에는 고정비 때문에 적자이고, 2년차부터 흑자가 되는 계획이며, 숫자는 대부분 가정입니다. 셋째, 번 돈이 아니라 매출의 0.5%를 사회에 환원하겠습니다. 국내 100대 기업 평균의 약 4배 수준입니다. 다음 단계는 소비자 설문, 부품 견적, 특허 조사입니다. 들어 주셔서 감사합니다. 질문 있으시면 말씀해 주세요.</a:t>
             </a:r>
             <a:endParaRPr lang="en-US" dirty="0"/>
           </a:p>
@@ -1546,7 +1546,7 @@
           <a:p>
             <a:r>
               <a:rPr lang="en-US" dirty="0"/>
-              <a:t>오늘 발표는 세 가지 질문에 답합니다. 첫째, 비슷한 제품은 얼마나 팔렸을까요? 둘째, 우리는 1년에 얼마를 팔 수 있을까요? 셋째, 번 돈의 몇 %를 사회에 돌려줄까요? 결론부터 말씀드리면, 경쟁 제품 중 Clocky는 연 평균 약 4백만 달러로 추정되고, Hatch는 언론 보도로 연 1억 4천만에서 2억 달러입니다. 우리는 1년차 매출 9억 원을 목표로 하고, 매출의 0.5%를 사회에 환원하겠다고 제안합니다. 그리고 숫자에는 세 가지 표시를 붙였습니다. 사실은 자료로 확인한 것, 추정은 자료로 계산한 것, 가정은 우리가 정한 값입니다. 이 표시를 기억해 주세요.</a:t>
+              <a:t>오늘 발표는 세 가지 질문에 답합니다. 첫째, 비슷한 제품은 얼마나 팔렸을까요? 둘째, 우리는 1년에 얼마를 팔 수 있을까요? 셋째, 번 돈의 몇 %를 사회에 돌려줄까요? 결론부터 말씀드리면, 경쟁 제품 중 Clocky는 연 평균 약 4백만 달러로 추정되고, Hatch는 회사 전체 매출이 언론 보도로 연 1억 4천만에서 2억 달러라고 합니다. 우리는 1년차 매출 9억 원을 목표로 하고, 매출의 0.5%를 사회에 환원하겠다고 제안합니다. 그리고 숫자에는 세 가지 표시를 붙였습니다. 사실은 자료로 확인한 것, 추정은 자료로 계산한 것, 가정은 우리가 정한 값입니다. 이 표시를 기억해 주세요.</a:t>
             </a:r>
             <a:endParaRPr lang="en-US" dirty="0"/>
           </a:p>
@@ -1722,7 +1722,7 @@
           <a:p>
             <a:r>
               <a:rPr lang="en-US" dirty="0"/>
-              <a:t>발표 전에 이 열 개의 숫자는 반드시 외워 두세요. 소비자가 99,000원이고 회사 매출 기준은 90,000원입니다. 한 대 팔 때 남는 돈은 17,500원입니다. 고정비는 3.5억 원이고 손익분기는 2만 대입니다. 1년차 매출은 9억 원이고 3년차는 54억 원입니다. 영업이익은 마이너스 1.75억, 플러스 1.14억, 플러스 6.26억입니다. 기부는 매출의 0.5%이고 1년차 450만 원입니다. 비교 숫자는 100대 기업 평균 0.12%, 필수소비재 0.52%, Patagonia 1%입니다. 경쟁 제품은 Clocky 연 약 4백만 달러(추정), Hatch 연 1.4억에서 2억 달러(보도)입니다.</a:t>
+              <a:t>발표 전에 이 열 개의 숫자는 반드시 외워 두세요. 소비자가 99,000원이고 회사 매출 기준은 90,000원입니다. 한 대 팔 때 남는 돈은 17,500원입니다. 고정비는 3.5억 원이고 손익분기는 2만 대입니다. 1년차 매출은 9억 원이고 3년차는 54억 원입니다. 영업이익은 마이너스 1.75억, 플러스 1.14억, 플러스 6.26억입니다. 기부는 매출의 0.5%이고 1년차 450만 원입니다. 비교 숫자는 100대 기업 평균 0.12%, 필수소비재 0.52%, Patagonia 1%입니다. 경쟁 제품은 Clocky 연 약 4백만 달러(추정), Hatch 회사 전체 연 1.4억에서 2억 달러(보도마다 다름)입니다.</a:t>
             </a:r>
             <a:endParaRPr lang="en-US" dirty="0"/>
           </a:p>
@@ -2250,7 +2250,7 @@
           <a:p>
             <a:r>
               <a:rPr lang="en-US" dirty="0"/>
-              <a:t>경쟁 제품의 1년 매출을 알아봤습니다. Clocky는 회사가 재무제표를 공개하지 않아서 직접 계산했습니다. 창업자가 2012년 인터뷰에서 누적 50만 대 이상 팔았다고 말했다고 보도됐습니다. 출시가 2006~2007년쯤이라 약 6년으로 보고, 50만을 6으로 나누면 1년에 약 8만 3천 대입니다. 여기에 가격 50달러를 곱하면 약 417만 달러, 대략 4백만 달러이고, 환율 1,400원으로 곱하면 약 59억 원입니다. 이것은 정가 기준의 최대치 추정입니다. Hatch는 비공개 기업인데, 언론이 연 1억 4천만 달러에서 2억 달러 정도라고 보도했습니다. 약 1,960억에서 2,800억 원입니다. 이것은 Hatch 전체 회사의 매출이고 아기 제품도 포함됩니다. 두 회사의 차이가 엄청나게 큰데, 기상 관련 제품도 크게 성공할 수 있다는 가능성을 보여 줍니다.</a:t>
+              <a:t>경쟁 제품의 1년 매출을 알아봤습니다. Clocky는 회사가 재무제표를 공개하지 않아서 직접 계산했습니다. 창업자가 2012년 인터뷰에서 누적 50만 대 이상 팔았다고 말했다고 보도됐습니다. 출시가 2006~2007년쯤이라 약 6년으로 보고, 50만을 6으로 나누면 1년에 약 8만 3천 대입니다. 여기에 가격 50달러를 곱하면 약 417만 달러, 대략 4백만 달러이고, 환율 1,400원으로 곱하면 약 59억 원입니다. 이것은 정가 기준의 최대치 추정입니다. Hatch는 비공개 기업인데, 언론이 연 1억 4천만 달러에서 2억 달러 정도라고 보도했습니다. 약 1,960억에서 2,800억 원입니다. 다만 보도마다 숫자가 다르고, 아기 제품까지 포함한 회사 전체 매출이며, 수면 시계만의 매출은 확인하지 못했습니다. 그래서 이 숫자는 경쟁 회사의 크기를 가늠하는 참고용으로만 쓰겠습니다.</a:t>
             </a:r>
             <a:endParaRPr lang="en-US" dirty="0"/>
           </a:p>
@@ -12387,7 +12387,7 @@
                   <a:schemeClr val="bg1"/>
                 </a:solidFill>
               </a:rPr>
-              <a:t>Clocky 연 약 $4M(추정), Hatch 연 약 $140~200M(보도) → 기상·수면 제품 시장은 작지 않아요</a:t>
+              <a:t>Clocky 연 약 $4M(추정), Hatch 회사 전체 약 $140~200M(보도마다 다름, 수면 시계만의 매출은 미확인)</a:t>
             </a:r>
             <a:endParaRPr lang="en-US" sz="2000" dirty="0"/>
           </a:p>
@@ -13471,7 +13471,21 @@
                   <a:schemeClr val="accent2"/>
                 </a:solidFill>
               </a:rPr>
-              <a:t>Hatch 연 약 $140~200M</a:t>
+              <a:t>Hatch(회사 전체)</a:t>
+            </a:r>
+            <a:endParaRPr lang="en-US" sz="2000" dirty="0"/>
+          </a:p>
+          <a:p>
+            <a:pPr indent="0" marL="0">
+              <a:buNone/>
+            </a:pPr>
+            <a:r>
+              <a:rPr lang="en-US" sz="2000" b="1" dirty="0">
+                <a:solidFill>
+                  <a:schemeClr val="accent2"/>
+                </a:solidFill>
+              </a:rPr>
+              <a:t>약 $140~200M(보도)</a:t>
             </a:r>
             <a:endParaRPr lang="en-US" sz="2000" dirty="0"/>
           </a:p>
@@ -15908,7 +15922,7 @@
                   <a:schemeClr val="bg1"/>
                 </a:solidFill>
               </a:rPr>
-              <a:t>Hatch 연 매출 (보도)</a:t>
+              <a:t>Hatch 회사 전체 매출 (보도마다 다름)</a:t>
             </a:r>
             <a:endParaRPr lang="en-US" sz="1300" dirty="0"/>
           </a:p>
@@ -21033,7 +21047,7 @@
                   <a:schemeClr val="accent1"/>
                 </a:solidFill>
               </a:rPr>
-              <a:t>Hatch (수면·기상 시계)</a:t>
+              <a:t>Hatch (회사 전체 매출)</a:t>
             </a:r>
             <a:endParaRPr lang="en-US" sz="1800" dirty="0"/>
           </a:p>
@@ -21083,8 +21097,8 @@
         </p:nvSpPr>
         <p:spPr>
           <a:xfrm>
-            <a:off x="822960" y="5029200"/>
-            <a:ext cx="4846320" cy="731520"/>
+            <a:off x="822960" y="4983480"/>
+            <a:ext cx="4846320" cy="822960"/>
           </a:xfrm>
           <a:prstGeom prst="rect">
             <a:avLst/>
@@ -21100,14 +21114,14 @@
               <a:buNone/>
             </a:pPr>
             <a:r>
-              <a:rPr lang="en-US" sz="1600" dirty="0">
+              <a:rPr lang="en-US" sz="1500" dirty="0">
                 <a:solidFill>
                   <a:schemeClr val="bg1"/>
                 </a:solidFill>
               </a:rPr>
-              <a:t>약 1,960억~2,800억원. 비공개 기업의 언론 보도 수치예요.</a:t>
-            </a:r>
-            <a:endParaRPr lang="en-US" sz="1600" dirty="0"/>
+              <a:t>약 1,960억~2,800억원. 보도마다 달라요. 수면 시계만의 매출은 확인 못 했어요.</a:t>
+            </a:r>
+            <a:endParaRPr lang="en-US" sz="1500" dirty="0"/>
           </a:p>
         </p:txBody>
       </p:sp>

--- a/MorningHands_Student_Presentation.pptx
+++ b/MorningHands_Student_Presentation.pptx
@@ -128,13 +128,13 @@
   <p:extLst>
     <p:ext uri="{521415D9-36F7-43E2-AB2F-B90AF26B5E84}">
       <p14:sectionLst xmlns:p14="http://schemas.microsoft.com/office/powerpoint/2010/main">
-        <p14:section name="도입" id="{c91bb8f2-c179-a93f-a850-595f82af5ccd}">
+        <p14:section name="도입" id="{38ee8cbb-818d-831d-db51-0bbe56830c6b}">
           <p14:sldIdLst>
             <p14:sldId id="256"/>
             <p14:sldId id="257"/>
           </p14:sldIdLst>
         </p14:section>
-        <p14:section name="1부 조사" id="{d33f214a-d894-0985-e869-e39f35a3937b}">
+        <p14:section name="1부 조사" id="{cba97bc7-54fb-b79b-0c1c-b39e868a93dd}">
           <p14:sldIdLst>
             <p14:sldId id="258"/>
             <p14:sldId id="259"/>
@@ -144,7 +144,7 @@
             <p14:sldId id="263"/>
           </p14:sldIdLst>
         </p14:section>
-        <p14:section name="2부 매출" id="{0b368df0-a5ca-4b51-3331-52ea5c800138}">
+        <p14:section name="2부 매출" id="{08eb0e88-4fee-4006-ab6f-67f1a5d97a51}">
           <p14:sldIdLst>
             <p14:sldId id="264"/>
             <p14:sldId id="265"/>
@@ -154,19 +154,19 @@
             <p14:sldId id="269"/>
           </p14:sldIdLst>
         </p14:section>
-        <p14:section name="3부 환원" id="{e95c9248-d04d-2f6f-a9a4-e187aa9f7a71}">
+        <p14:section name="3부 환원" id="{a16be7ee-e715-02c7-223a-6f9068c29f94}">
           <p14:sldIdLst>
             <p14:sldId id="270"/>
             <p14:sldId id="271"/>
           </p14:sldIdLst>
         </p14:section>
-        <p14:section name="마무리" id="{61b7f2af-7629-e83d-8519-6266d1ba1d9f}">
+        <p14:section name="마무리" id="{669b3627-4d7b-f846-6ec9-10042c4b037a}">
           <p14:sldIdLst>
             <p14:sldId id="272"/>
             <p14:sldId id="273"/>
           </p14:sldIdLst>
         </p14:section>
-        <p14:section name="부록" id="{87fe39e5-9f49-118a-3487-8f90059dc74e}">
+        <p14:section name="부록" id="{ef0a6494-f597-4d65-2df2-39c7c08d5266}">
           <p14:sldIdLst>
             <p14:sldId id="274"/>
             <p14:sldId id="275"/>
@@ -1106,7 +1106,7 @@
           <a:p>
             <a:r>
               <a:rPr lang="en-US" dirty="0"/>
-              <a:t>3부, 사회 환원입니다. 번 돈의 몇 %를 사회에 돌려주는 것이 적당할까요? 먼저 다른 기업들은 얼마나 하는지 조사했습니다. 한국사회복지협의회의 2024 사회공헌 백서에 따르면 2023년 국내 100대 기업 중 지출을 공개한 90개 기업이 쓴 사회공헌 금액은 매출의 0.12%였습니다. 업종별로는 필수소비재가 0.52%로 가장 높았습니다. 해외에서는 Patagonia라는 옷 회사가 1985년부터 매출의 1%를 환경 단체에 기부하고 있습니다. 그래서 우리는 매출의 0.5%를 제안합니다. 100대 기업 평균의 약 4배이고, 소비자 제품을 만드는 업종의 평균인 0.52%와 비슷하며, Patagonia의 절반입니다. 세법에서는 기부금이 한도 안에서만 비용으로 인정되고, 넘는 부분은 10년 동안 이월됩니다. 정확한 한도 비율은 세무사에게 확인해야 합니다.</a:t>
+              <a:t>3부, 사회 환원입니다. 번 돈의 몇 %를 사회에 돌려주는 것이 적당할까요? 먼저 다른 기업들은 얼마나 하는지 조사했습니다. 한국사회복지협의회의 2024 사회공헌 백서에 따르면 2023년 국내 100대 기업 중 지출을 공개한 90개 기업이 쓴 사회공헌 금액은 매출의 0.12%였습니다. 업종별로는 필수소비재가 0.52%로 가장 높았습니다. 해외에서는 Patagonia라는 옷 회사가 1985년부터 매출의 1%를 환경 단체에 기부하고 있습니다. 그래서 우리는 매출의 0.5%를 제안합니다. 100대 기업 평균의 약 4배이고, 소비자 제품을 만드는 업종의 평균인 0.52%와 비슷하며, Patagonia의 절반입니다. 법인세법 제24조에 따르면 일반기부금은 소득금액 등의 10%까지만 비용으로 인정되고, 넘는 부분은 10년 동안 이월됩니다. 사회적기업은 30%입니다. 제품으로 기부할 때 부가세가 어떻게 되는지는 아직 확인하지 못했습니다.</a:t>
             </a:r>
             <a:endParaRPr lang="en-US" dirty="0"/>
           </a:p>
@@ -1282,7 +1282,7 @@
           <a:p>
             <a:r>
               <a:rPr lang="en-US" dirty="0"/>
-              <a:t>발표를 마무리하기 전에, 우리가 아직 모르는 것들을 솔직하게 말씀드리겠습니다. 첫째, 우리 쪽 숫자는 대부분 가정입니다. 부품 원가, 판매 대수, 고정비는 실제 견적을 받으면 바뀝니다. 둘째, 사람들이 99,000원을 내고 살지는 아직 확인하지 못했습니다. 설문과 사전 예약으로 검증해야 합니다. 셋째, 안전입니다. 자는 동안 몸에 닿는 제품이라 어린이나 고령자가 다치지 않도록 힘 제한과 정지 센서가 필요합니다. 넷째, 인증입니다. 배터리 KC 인증이 업체 안내로 700만에서 1,500만 원, 블루투스 시험이 200만에서 300만 원 정도라고 하는데, 실제 견적을 받아야 합니다. 다섯째, 특허입니다. 비슷한 특허가 있는지 조사해야 합니다. 여섯째, 법과 세금입니다. 기부금 한도 비율과 제품 기부의 부가세는 세무사에게 확인해야 합니다. 이렇게 모르는 것을 정확히 아는 것도 창업 계획의 중요한 부분이라고 생각합니다.</a:t>
+              <a:t>발표를 마무리하기 전에, 우리가 아직 모르는 것들을 솔직하게 말씀드리겠습니다. 첫째, 우리 쪽 숫자는 대부분 가정입니다. 부품 원가, 판매 대수, 고정비는 실제 견적을 받으면 바뀝니다. 둘째, 사람들이 99,000원을 내고 살지는 아직 확인하지 못했습니다. 설문과 사전 예약으로 검증해야 합니다. 셋째, 안전입니다. 자는 동안 몸에 닿는 제품이라 어린이나 고령자가 다치지 않도록 힘 제한과 정지 센서가 필요합니다. 넷째, 인증입니다. 배터리 KC 인증이 업체 안내로 700만에서 1,500만 원, 블루투스 시험이 200만에서 300만 원 정도라고 하는데, 실제 견적을 받아야 합니다. 다섯째, 특허입니다. 비슷한 특허가 있는지 조사해야 합니다. 여섯째, 법과 세금입니다. 기부금 한도는 법인세법에 소득금액 등의 10%로 나와 있지만, 제품 기부의 부가세는 세무사에게 확인해야 합니다. 이렇게 모르는 것을 정확히 아는 것도 창업 계획의 중요한 부분이라고 생각합니다.</a:t>
             </a:r>
             <a:endParaRPr lang="en-US" dirty="0"/>
           </a:p>
@@ -1370,7 +1370,7 @@
           <a:p>
             <a:r>
               <a:rPr lang="en-US" dirty="0"/>
-              <a:t>정리하겠습니다. 첫째, 비슷한 제품은 Clocky가 연 평균 약 4백만 달러로 추정되고, Hatch는 회사 전체 매출이 언론 보도로 연 1억 4천만에서 2억 달러라고 하지만, 보도마다 다르고 수면 시계만의 매출은 확인하지 못했습니다. 둘째, 우리는 1년차 매출 9억 원, 3년차 54억 원을 계획했습니다. 처음에는 고정비 때문에 적자이고, 2년차부터 흑자가 되는 계획이며, 숫자는 대부분 가정입니다. 셋째, 번 돈이 아니라 매출의 0.5%를 사회에 환원하겠습니다. 국내 100대 기업 평균의 약 4배 수준입니다. 다음 단계는 소비자 설문, 부품 견적, 특허 조사입니다. 들어 주셔서 감사합니다. 질문 있으시면 말씀해 주세요.</a:t>
+              <a:t>정리하겠습니다. 첫째, 비슷한 제품은 Clocky가 연 평균 약 4백만 달러로 추정되고, Hatch는 회사 전체 매출이 언론 보도로 2023년 약 1억 4천만 달러, 최근 연 2억 달러라고 하지만, 수면 시계만의 매출은 확인하지 못했습니다. 둘째, 우리는 1년차 매출 9억 원, 3년차 54억 원을 계획했습니다. 처음에는 고정비 때문에 적자이고, 2년차부터 흑자가 되는 계획이며, 숫자는 대부분 가정입니다. 셋째, 번 돈이 아니라 매출의 0.5%를 사회에 환원하겠습니다. 국내 100대 기업 평균의 약 4배 수준입니다. 다음 단계는 소비자 설문, 부품 견적, 특허 조사입니다. 들어 주셔서 감사합니다. 질문 있으시면 말씀해 주세요.</a:t>
             </a:r>
             <a:endParaRPr lang="en-US" dirty="0"/>
           </a:p>
@@ -1722,7 +1722,7 @@
           <a:p>
             <a:r>
               <a:rPr lang="en-US" dirty="0"/>
-              <a:t>발표 전에 이 열 개의 숫자는 반드시 외워 두세요. 소비자가 99,000원이고 회사 매출 기준은 90,000원입니다. 한 대 팔 때 남는 돈은 17,500원입니다. 고정비는 3.5억 원이고 손익분기는 2만 대입니다. 1년차 매출은 9억 원이고 3년차는 54억 원입니다. 영업이익은 마이너스 1.75억, 플러스 1.14억, 플러스 6.26억입니다. 기부는 매출의 0.5%이고 1년차 450만 원입니다. 비교 숫자는 100대 기업 평균 0.12%, 필수소비재 0.52%, Patagonia 1%입니다. 경쟁 제품은 Clocky 연 약 4백만 달러(추정), Hatch 회사 전체 연 1.4억에서 2억 달러(보도마다 다름)입니다.</a:t>
+              <a:t>발표 전에 이 열 개의 숫자는 반드시 외워 두세요. 소비자가 99,000원이고 회사 매출 기준은 90,000원입니다. 한 대 팔 때 남는 돈은 17,500원입니다. 고정비는 3.5억 원이고 손익분기는 2만 대입니다. 1년차 매출은 9억 원이고 3년차는 54억 원입니다. 영업이익은 마이너스 1.75억, 플러스 1.14억, 플러스 6.26억입니다. 기부는 매출의 0.5%이고 1년차 450만 원입니다. 비교 숫자는 100대 기업 평균 0.12%, 필수소비재 0.52%, Patagonia 1%입니다. 경쟁 제품은 Clocky 연 약 4백만 달러(추정), Hatch 회사 전체 2023년 1.4억, 최근 2억 달러(보도)입니다.</a:t>
             </a:r>
             <a:endParaRPr lang="en-US" dirty="0"/>
           </a:p>
@@ -2250,7 +2250,7 @@
           <a:p>
             <a:r>
               <a:rPr lang="en-US" dirty="0"/>
-              <a:t>경쟁 제품의 1년 매출을 알아봤습니다. Clocky는 회사가 재무제표를 공개하지 않아서 직접 계산했습니다. 창업자가 2012년 인터뷰에서 누적 50만 대 이상 팔았다고 말했다고 보도됐습니다. 출시가 2006~2007년쯤이라 약 6년으로 보고, 50만을 6으로 나누면 1년에 약 8만 3천 대입니다. 여기에 가격 50달러를 곱하면 약 417만 달러, 대략 4백만 달러이고, 환율 1,400원으로 곱하면 약 59억 원입니다. 이것은 정가 기준의 최대치 추정입니다. Hatch는 비공개 기업인데, 언론이 연 1억 4천만 달러에서 2억 달러 정도라고 보도했습니다. 약 1,960억에서 2,800억 원입니다. 다만 보도마다 숫자가 다르고, 아기 제품까지 포함한 회사 전체 매출이며, 수면 시계만의 매출은 확인하지 못했습니다. 그래서 이 숫자는 경쟁 회사의 크기를 가늠하는 참고용으로만 쓰겠습니다.</a:t>
+              <a:t>경쟁 제품의 1년 매출을 알아봤습니다. Clocky는 회사가 재무제표를 공개하지 않아서 직접 계산했습니다. 창업자가 2012년 인터뷰에서 누적 50만 대 이상 팔았다고 말했다고 보도됐습니다. 출시가 2006~2007년쯤이라 약 6년으로 보고, 50만을 6으로 나누면 1년에 약 8만 3천 대입니다. 여기에 가격 50달러를 곱하면 약 417만 달러, 대략 4백만 달러이고, 환율 1,400원으로 곱하면 약 59억 원입니다. 이것은 정가 기준의 최대치 추정입니다. Hatch는 비공개 기업인데, 언론 보도로는 2023년 매출이 약 1억 4천만 달러였고, 최근에는 연 2억 달러라고 합니다. 약 1,960억에서 2,800억 원입니다. 다만 아기 제품까지 포함한 회사 전체 매출이며, 수면 시계만의 매출은 확인하지 못했습니다. 그래서 이 숫자는 경쟁 회사의 크기를 가늠하는 참고용으로만 쓰겠습니다.</a:t>
             </a:r>
             <a:endParaRPr lang="en-US" dirty="0"/>
           </a:p>
@@ -8945,7 +8945,7 @@
                   <a:schemeClr val="tx2"/>
                 </a:solidFill>
               </a:rPr>
-              <a:t>기부금은 한도 안에서만 비용 인정, 초과분은 10년 이월. 한도 비율은 세무사 확인</a:t>
+              <a:t>일반기부금은 소득금액 등의 10%까지 비용 인정(사회적기업 30%), 초과분은 10년 이월. 제품 기부의 부가세는 확인 필요</a:t>
             </a:r>
             <a:endParaRPr lang="en-US" sz="1400" dirty="0"/>
           </a:p>
@@ -12146,7 +12146,7 @@
                   <a:schemeClr val="tx2"/>
                 </a:solidFill>
               </a:rPr>
-              <a:t>기부금 한도 비율과 제품 기부의 부가세는 세무사에게 확인해야 해요.</a:t>
+              <a:t>기부금 한도는 소득금액 등의 10%(법인세법 제24조). 제품 기부의 부가세는 세무사에게 확인해야 해요.</a:t>
             </a:r>
             <a:endParaRPr lang="en-US" sz="1400" dirty="0"/>
           </a:p>
@@ -12387,7 +12387,7 @@
                   <a:schemeClr val="bg1"/>
                 </a:solidFill>
               </a:rPr>
-              <a:t>Clocky 연 약 $4M(추정), Hatch 회사 전체 약 $140~200M(보도마다 다름, 수면 시계만의 매출은 미확인)</a:t>
+              <a:t>Clocky 연 약 $4M(추정), Hatch 회사 전체 2023년 약 $140M → 최근 $200M (보도, 수면 시계만의 매출은 미확인)</a:t>
             </a:r>
             <a:endParaRPr lang="en-US" sz="2000" dirty="0"/>
           </a:p>
@@ -15886,7 +15886,7 @@
                   <a:schemeClr val="accent1"/>
                 </a:solidFill>
               </a:rPr>
-              <a:t>$140~200M</a:t>
+              <a:t>$140→200M</a:t>
             </a:r>
             <a:endParaRPr lang="en-US" sz="1900" dirty="0"/>
           </a:p>
@@ -15922,7 +15922,7 @@
                   <a:schemeClr val="bg1"/>
                 </a:solidFill>
               </a:rPr>
-              <a:t>Hatch 회사 전체 매출 (보도마다 다름)</a:t>
+              <a:t>Hatch 회사 전체 매출 (2023년→최근, 보도)</a:t>
             </a:r>
             <a:endParaRPr lang="en-US" sz="1300" dirty="0"/>
           </a:p>
@@ -21119,7 +21119,7 @@
                   <a:schemeClr val="bg1"/>
                 </a:solidFill>
               </a:rPr>
-              <a:t>약 1,960억~2,800억원. 보도마다 달라요. 수면 시계만의 매출은 확인 못 했어요.</a:t>
+              <a:t>약 1,960억~2,800억원. 2023년 $140M → 최근 $200M(보도). 아기 제품 포함, 수면 시계만의 매출은 확인 못 했어요.</a:t>
             </a:r>
             <a:endParaRPr lang="en-US" sz="1500" dirty="0"/>
           </a:p>
